--- a/rapports/septembre/Monoprix_Courses_sept2026.pptx
+++ b/rapports/septembre/Monoprix_Courses_sept2026.pptx
@@ -6116,7 +6116,7 @@
                 </a:solidFill>
                 <a:latin typeface="Arial"/>
               </a:rPr>
-              <a:t>MARQUES CITÉES</a:t>
+              <a:t>CATÉGORIES DE PRODUITS</a:t>
             </a:r>
           </a:p>
         </p:txBody>
@@ -6151,7 +6151,7 @@
                 </a:solidFill>
                 <a:latin typeface="Arial"/>
               </a:rPr>
-              <a:t>Part de voix dans les messages utilisateurs</a:t>
+              <a:t>Répartition des requêtes</a:t>
             </a:r>
           </a:p>
         </p:txBody>
@@ -6244,7 +6244,7 @@
         <p:spPr>
           <a:xfrm>
             <a:off x="8296656" y="4389120"/>
-            <a:ext cx="2072640" cy="152400"/>
+            <a:ext cx="2225040" cy="152400"/>
           </a:xfrm>
           <a:prstGeom prst="rect">
             <a:avLst/>
@@ -6265,7 +6265,7 @@
                 </a:solidFill>
                 <a:latin typeface="Arial"/>
               </a:rPr>
-              <a:t>Lidl</a:t>
+              <a:t>Boissons, bières et desserts</a:t>
             </a:r>
           </a:p>
         </p:txBody>
@@ -6323,7 +6323,7 @@
         <p:spPr>
           <a:xfrm>
             <a:off x="8296656" y="4657344"/>
-            <a:ext cx="2072640" cy="152400"/>
+            <a:ext cx="2225040" cy="152400"/>
           </a:xfrm>
           <a:prstGeom prst="rect">
             <a:avLst/>
@@ -6338,13 +6338,13 @@
           <a:p>
             <a:pPr algn="l"/>
             <a:r>
-              <a:rPr sz="1000" b="0" i="0">
+              <a:rPr sz="800" b="0" i="0">
                 <a:solidFill>
                   <a:srgbClr val="111111"/>
                 </a:solidFill>
                 <a:latin typeface="Arial"/>
               </a:rPr>
-              <a:t>E.Leclerc · 20 %</a:t>
+              <a:t>Produits frais, fruits et salades · 18 %</a:t>
             </a:r>
           </a:p>
         </p:txBody>
@@ -6402,7 +6402,7 @@
         <p:spPr>
           <a:xfrm>
             <a:off x="8296656" y="4925568"/>
-            <a:ext cx="2072640" cy="152400"/>
+            <a:ext cx="2225040" cy="152400"/>
           </a:xfrm>
           <a:prstGeom prst="rect">
             <a:avLst/>
@@ -6417,13 +6417,13 @@
           <a:p>
             <a:pPr algn="l"/>
             <a:r>
-              <a:rPr sz="1000" b="0" i="0">
+              <a:rPr sz="800" b="0" i="0">
                 <a:solidFill>
                   <a:srgbClr val="111111"/>
                 </a:solidFill>
                 <a:latin typeface="Arial"/>
               </a:rPr>
-              <a:t>Auchan · 11 %</a:t>
+              <a:t>Entretien, hygiène et santé · 15 %</a:t>
             </a:r>
           </a:p>
         </p:txBody>
@@ -6481,7 +6481,7 @@
         <p:spPr>
           <a:xfrm>
             <a:off x="8296656" y="5193792"/>
-            <a:ext cx="2072640" cy="152400"/>
+            <a:ext cx="2225040" cy="152400"/>
           </a:xfrm>
           <a:prstGeom prst="rect">
             <a:avLst/>
@@ -6496,13 +6496,13 @@
           <a:p>
             <a:pPr algn="l"/>
             <a:r>
-              <a:rPr sz="1000" b="0" i="0">
+              <a:rPr sz="800" b="0" i="0">
                 <a:solidFill>
                   <a:srgbClr val="111111"/>
                 </a:solidFill>
                 <a:latin typeface="Arial"/>
               </a:rPr>
-              <a:t>Carrefour · 11 %</a:t>
+              <a:t>Viandes, poissons et plats préparés · 10 %</a:t>
             </a:r>
           </a:p>
         </p:txBody>
@@ -6560,7 +6560,7 @@
         <p:spPr>
           <a:xfrm>
             <a:off x="8296656" y="5462016"/>
-            <a:ext cx="2072640" cy="152400"/>
+            <a:ext cx="2225040" cy="152400"/>
           </a:xfrm>
           <a:prstGeom prst="rect">
             <a:avLst/>
@@ -6575,13 +6575,13 @@
           <a:p>
             <a:pPr algn="l"/>
             <a:r>
-              <a:rPr sz="1000" b="0" i="0">
+              <a:rPr sz="800" b="0" i="0">
                 <a:solidFill>
                   <a:srgbClr val="111111"/>
                 </a:solidFill>
                 <a:latin typeface="Arial"/>
               </a:rPr>
-              <a:t>Intermarché · 8 %</a:t>
+              <a:t>Bébé et alimentation animale · 2 %</a:t>
             </a:r>
           </a:p>
         </p:txBody>
@@ -6594,87 +6594,8 @@
         </p:nvSpPr>
         <p:spPr>
           <a:xfrm>
-            <a:off x="8077200" y="5748528"/>
-            <a:ext cx="121920" cy="121920"/>
-          </a:xfrm>
-          <a:prstGeom prst="rect">
-            <a:avLst/>
-          </a:prstGeom>
-          <a:solidFill>
-            <a:srgbClr val="A09278"/>
-          </a:solidFill>
-          <a:ln>
-            <a:noFill/>
-          </a:ln>
-          <a:effectLst/>
-        </p:spPr>
-        <p:style>
-          <a:lnRef idx="1">
-            <a:schemeClr val="accent1"/>
-          </a:lnRef>
-          <a:fillRef idx="3">
-            <a:schemeClr val="accent1"/>
-          </a:fillRef>
-          <a:effectRef idx="2">
-            <a:schemeClr val="accent1"/>
-          </a:effectRef>
-          <a:fontRef idx="minor">
-            <a:schemeClr val="lt1"/>
-          </a:fontRef>
-        </p:style>
-        <p:txBody>
-          <a:bodyPr rtlCol="0" anchor="ctr"/>
-          <a:lstStyle/>
-          <a:p>
-            <a:pPr algn="ctr"/>
-          </a:p>
-        </p:txBody>
-      </p:sp>
-      <p:sp>
-        <p:nvSpPr>
-          <p:cNvPr id="91" name="TextBox 90"/>
-          <p:cNvSpPr txBox="1"/>
-          <p:nvPr/>
-        </p:nvSpPr>
-        <p:spPr>
-          <a:xfrm>
-            <a:off x="8296656" y="5730240"/>
-            <a:ext cx="2072640" cy="152400"/>
-          </a:xfrm>
-          <a:prstGeom prst="rect">
-            <a:avLst/>
-          </a:prstGeom>
-          <a:noFill/>
-        </p:spPr>
-        <p:txBody>
-          <a:bodyPr wrap="square" anchor="t" lIns="0" rIns="0" tIns="0" bIns="0">
-            <a:spAutoFit/>
-          </a:bodyPr>
-          <a:lstStyle/>
-          <a:p>
-            <a:pPr algn="l"/>
-            <a:r>
-              <a:rPr sz="1000" b="0" i="0">
-                <a:solidFill>
-                  <a:srgbClr val="111111"/>
-                </a:solidFill>
-                <a:latin typeface="Arial"/>
-              </a:rPr>
-              <a:t>Autres (dont Monoprix 5,5 %) · 23 %</a:t>
-            </a:r>
-          </a:p>
-        </p:txBody>
-      </p:sp>
-      <p:sp>
-        <p:nvSpPr>
-          <p:cNvPr id="92" name="Rectangle 91"/>
-          <p:cNvSpPr/>
-          <p:nvPr/>
-        </p:nvSpPr>
-        <p:spPr>
-          <a:xfrm>
             <a:off x="10564368" y="4450080"/>
-            <a:ext cx="475488" cy="362102"/>
+            <a:ext cx="475488" cy="737616"/>
           </a:xfrm>
           <a:prstGeom prst="rect">
             <a:avLst/>
@@ -6711,14 +6632,14 @@
       </p:sp>
       <p:sp>
         <p:nvSpPr>
-          <p:cNvPr id="93" name="TextBox 92"/>
+          <p:cNvPr id="91" name="TextBox 90"/>
           <p:cNvSpPr txBox="1"/>
           <p:nvPr/>
         </p:nvSpPr>
         <p:spPr>
           <a:xfrm>
             <a:off x="10564368" y="4450080"/>
-            <a:ext cx="475488" cy="362102"/>
+            <a:ext cx="475488" cy="737616"/>
           </a:xfrm>
           <a:prstGeom prst="rect">
             <a:avLst/>
@@ -6739,21 +6660,21 @@
                 </a:solidFill>
                 <a:latin typeface="Arial"/>
               </a:rPr>
-              <a:t>27 %</a:t>
-            </a:r>
-          </a:p>
-        </p:txBody>
-      </p:sp>
-      <p:sp>
-        <p:nvSpPr>
-          <p:cNvPr id="94" name="Rectangle 93"/>
+              <a:t>55 %</a:t>
+            </a:r>
+          </a:p>
+        </p:txBody>
+      </p:sp>
+      <p:sp>
+        <p:nvSpPr>
+          <p:cNvPr id="92" name="Rectangle 91"/>
           <p:cNvSpPr/>
           <p:nvPr/>
         </p:nvSpPr>
         <p:spPr>
           <a:xfrm>
-            <a:off x="10564368" y="4812182"/>
-            <a:ext cx="475488" cy="268224"/>
+            <a:off x="10564368" y="5187696"/>
+            <a:ext cx="475488" cy="241401"/>
           </a:xfrm>
           <a:prstGeom prst="rect">
             <a:avLst/>
@@ -6790,14 +6711,14 @@
       </p:sp>
       <p:sp>
         <p:nvSpPr>
-          <p:cNvPr id="95" name="Rectangle 94"/>
+          <p:cNvPr id="93" name="Rectangle 92"/>
           <p:cNvSpPr/>
           <p:nvPr/>
         </p:nvSpPr>
         <p:spPr>
           <a:xfrm>
-            <a:off x="10564368" y="5080406"/>
-            <a:ext cx="475488" cy="147523"/>
+            <a:off x="10564368" y="5429097"/>
+            <a:ext cx="475488" cy="201168"/>
           </a:xfrm>
           <a:prstGeom prst="rect">
             <a:avLst/>
@@ -6834,14 +6755,14 @@
       </p:sp>
       <p:sp>
         <p:nvSpPr>
-          <p:cNvPr id="96" name="Rectangle 95"/>
+          <p:cNvPr id="94" name="Rectangle 93"/>
           <p:cNvSpPr/>
           <p:nvPr/>
         </p:nvSpPr>
         <p:spPr>
           <a:xfrm>
-            <a:off x="10564368" y="5227929"/>
-            <a:ext cx="475488" cy="147523"/>
+            <a:off x="10564368" y="5630265"/>
+            <a:ext cx="475488" cy="134112"/>
           </a:xfrm>
           <a:prstGeom prst="rect">
             <a:avLst/>
@@ -6878,64 +6799,20 @@
       </p:sp>
       <p:sp>
         <p:nvSpPr>
-          <p:cNvPr id="97" name="Rectangle 96"/>
+          <p:cNvPr id="95" name="Rectangle 94"/>
           <p:cNvSpPr/>
           <p:nvPr/>
         </p:nvSpPr>
         <p:spPr>
           <a:xfrm>
-            <a:off x="10564368" y="5375452"/>
-            <a:ext cx="475488" cy="107289"/>
+            <a:off x="10564368" y="5764377"/>
+            <a:ext cx="475488" cy="26822"/>
           </a:xfrm>
           <a:prstGeom prst="rect">
             <a:avLst/>
           </a:prstGeom>
           <a:solidFill>
             <a:srgbClr val="3E5A78"/>
-          </a:solidFill>
-          <a:ln>
-            <a:noFill/>
-          </a:ln>
-          <a:effectLst/>
-        </p:spPr>
-        <p:style>
-          <a:lnRef idx="1">
-            <a:schemeClr val="accent1"/>
-          </a:lnRef>
-          <a:fillRef idx="3">
-            <a:schemeClr val="accent1"/>
-          </a:fillRef>
-          <a:effectRef idx="2">
-            <a:schemeClr val="accent1"/>
-          </a:effectRef>
-          <a:fontRef idx="minor">
-            <a:schemeClr val="lt1"/>
-          </a:fontRef>
-        </p:style>
-        <p:txBody>
-          <a:bodyPr rtlCol="0" anchor="ctr"/>
-          <a:lstStyle/>
-          <a:p>
-            <a:pPr algn="ctr"/>
-          </a:p>
-        </p:txBody>
-      </p:sp>
-      <p:sp>
-        <p:nvSpPr>
-          <p:cNvPr id="98" name="Rectangle 97"/>
-          <p:cNvSpPr/>
-          <p:nvPr/>
-        </p:nvSpPr>
-        <p:spPr>
-          <a:xfrm>
-            <a:off x="10564368" y="5482742"/>
-            <a:ext cx="475488" cy="308457"/>
-          </a:xfrm>
-          <a:prstGeom prst="rect">
-            <a:avLst/>
-          </a:prstGeom>
-          <a:solidFill>
-            <a:srgbClr val="A09278"/>
           </a:solidFill>
           <a:ln>
             <a:noFill/>
